--- a/docs/report/sum0911/DTB阶段性汇报.pptx
+++ b/docs/report/sum0911/DTB阶段性汇报.pptx
@@ -110,6 +110,11 @@
       </a:defRPr>
     </a:lvl9pPr>
   </p:defaultTextStyle>
+  <p:extLst>
+    <p:ext uri="{EFAFB233-063F-42B5-8137-9DF3F51BA10A}">
+      <p15:sldGuideLst xmlns:p15="http://schemas.microsoft.com/office/powerpoint/2012/main"/>
+    </p:ext>
+  </p:extLst>
 </p:presentation>
 </file>
 
@@ -828,11 +833,6 @@
           <c:dPt>
             <c:idx val="0"/>
             <c:bubble3D val="0"/>
-            <c:spPr>
-              <a:ln w="0">
-                <a:noFill/>
-              </a:ln>
-            </c:spPr>
             <c:extLst>
               <c:ext xmlns:c16="http://schemas.microsoft.com/office/drawing/2014/chart" uri="{C3380CC4-5D6E-409C-BE32-E72D297353CC}">
                 <c16:uniqueId val="{00000009-86B1-46AA-92E6-03A0F8E06832}"/>
@@ -842,11 +842,6 @@
           <c:dPt>
             <c:idx val="1"/>
             <c:bubble3D val="0"/>
-            <c:spPr>
-              <a:ln w="0">
-                <a:noFill/>
-              </a:ln>
-            </c:spPr>
             <c:extLst>
               <c:ext xmlns:c16="http://schemas.microsoft.com/office/drawing/2014/chart" uri="{C3380CC4-5D6E-409C-BE32-E72D297353CC}">
                 <c16:uniqueId val="{0000000B-86B1-46AA-92E6-03A0F8E06832}"/>
@@ -856,11 +851,6 @@
           <c:dPt>
             <c:idx val="2"/>
             <c:bubble3D val="0"/>
-            <c:spPr>
-              <a:ln w="0">
-                <a:noFill/>
-              </a:ln>
-            </c:spPr>
             <c:extLst>
               <c:ext xmlns:c16="http://schemas.microsoft.com/office/drawing/2014/chart" uri="{C3380CC4-5D6E-409C-BE32-E72D297353CC}">
                 <c16:uniqueId val="{0000000D-86B1-46AA-92E6-03A0F8E06832}"/>
@@ -870,11 +860,6 @@
           <c:dPt>
             <c:idx val="3"/>
             <c:bubble3D val="0"/>
-            <c:spPr>
-              <a:ln w="0">
-                <a:noFill/>
-              </a:ln>
-            </c:spPr>
             <c:extLst>
               <c:ext xmlns:c16="http://schemas.microsoft.com/office/drawing/2014/chart" uri="{C3380CC4-5D6E-409C-BE32-E72D297353CC}">
                 <c16:uniqueId val="{0000000F-86B1-46AA-92E6-03A0F8E06832}"/>
@@ -884,11 +869,6 @@
           <c:dPt>
             <c:idx val="4"/>
             <c:bubble3D val="0"/>
-            <c:spPr>
-              <a:ln w="0">
-                <a:noFill/>
-              </a:ln>
-            </c:spPr>
             <c:extLst>
               <c:ext xmlns:c16="http://schemas.microsoft.com/office/drawing/2014/chart" uri="{C3380CC4-5D6E-409C-BE32-E72D297353CC}">
                 <c16:uniqueId val="{00000011-86B1-46AA-92E6-03A0F8E06832}"/>
@@ -898,11 +878,6 @@
           <c:dPt>
             <c:idx val="5"/>
             <c:bubble3D val="0"/>
-            <c:spPr>
-              <a:ln w="0">
-                <a:noFill/>
-              </a:ln>
-            </c:spPr>
             <c:extLst>
               <c:ext xmlns:c16="http://schemas.microsoft.com/office/drawing/2014/chart" uri="{C3380CC4-5D6E-409C-BE32-E72D297353CC}">
                 <c16:uniqueId val="{00000013-86B1-46AA-92E6-03A0F8E06832}"/>
@@ -912,11 +887,6 @@
           <c:dPt>
             <c:idx val="6"/>
             <c:bubble3D val="0"/>
-            <c:spPr>
-              <a:ln w="0">
-                <a:noFill/>
-              </a:ln>
-            </c:spPr>
             <c:extLst>
               <c:ext xmlns:c16="http://schemas.microsoft.com/office/drawing/2014/chart" uri="{C3380CC4-5D6E-409C-BE32-E72D297353CC}">
                 <c16:uniqueId val="{00000015-86B1-46AA-92E6-03A0F8E06832}"/>
@@ -926,11 +896,6 @@
           <c:dPt>
             <c:idx val="7"/>
             <c:bubble3D val="0"/>
-            <c:spPr>
-              <a:ln w="0">
-                <a:noFill/>
-              </a:ln>
-            </c:spPr>
             <c:extLst>
               <c:ext xmlns:c16="http://schemas.microsoft.com/office/drawing/2014/chart" uri="{C3380CC4-5D6E-409C-BE32-E72D297353CC}">
                 <c16:uniqueId val="{00000017-86B1-46AA-92E6-03A0F8E06832}"/>
@@ -940,11 +905,6 @@
           <c:dPt>
             <c:idx val="8"/>
             <c:bubble3D val="0"/>
-            <c:spPr>
-              <a:ln w="0">
-                <a:noFill/>
-              </a:ln>
-            </c:spPr>
             <c:extLst>
               <c:ext xmlns:c16="http://schemas.microsoft.com/office/drawing/2014/chart" uri="{C3380CC4-5D6E-409C-BE32-E72D297353CC}">
                 <c16:uniqueId val="{00000019-86B1-46AA-92E6-03A0F8E06832}"/>
@@ -954,11 +914,6 @@
           <c:dPt>
             <c:idx val="9"/>
             <c:bubble3D val="0"/>
-            <c:spPr>
-              <a:ln w="0">
-                <a:noFill/>
-              </a:ln>
-            </c:spPr>
             <c:extLst>
               <c:ext xmlns:c16="http://schemas.microsoft.com/office/drawing/2014/chart" uri="{C3380CC4-5D6E-409C-BE32-E72D297353CC}">
                 <c16:uniqueId val="{0000001B-86B1-46AA-92E6-03A0F8E06832}"/>
@@ -968,11 +923,6 @@
           <c:dPt>
             <c:idx val="10"/>
             <c:bubble3D val="0"/>
-            <c:spPr>
-              <a:ln w="0">
-                <a:noFill/>
-              </a:ln>
-            </c:spPr>
             <c:extLst>
               <c:ext xmlns:c16="http://schemas.microsoft.com/office/drawing/2014/chart" uri="{C3380CC4-5D6E-409C-BE32-E72D297353CC}">
                 <c16:uniqueId val="{0000001D-86B1-46AA-92E6-03A0F8E06832}"/>
